--- a/自身の研究/大学院での研究/修士論文進捗発表/G26014_西村和真_202660617.pptx
+++ b/自身の研究/大学院での研究/修士論文進捗発表/G26014_西村和真_202660617.pptx
@@ -221,7 +221,7 @@
                 <a:latin typeface="Meiryo UI" panose="020B0604030504040204" pitchFamily="50" charset="-128"/>
                 <a:ea typeface="Meiryo UI" panose="020B0604030504040204" pitchFamily="50" charset="-128"/>
               </a:rPr>
-              <a:t>2026年6月18日</a:t>
+              <a:t>2026年10月1日</a:t>
             </a:fld>
             <a:endParaRPr kumimoji="1" lang="ja-JP" altLang="en-US" dirty="0">
               <a:latin typeface="Meiryo UI" panose="020B0604030504040204" pitchFamily="50" charset="-128"/>
@@ -405,7 +405,7 @@
             <a:fld id="{EECA54F6-A409-4052-BA8C-D33E3AF8AD29}" type="datetime4">
               <a:rPr lang="ja-JP" altLang="en-US" smtClean="0"/>
               <a:pPr/>
-              <a:t>2026年6月18日</a:t>
+              <a:t>2026年10月1日</a:t>
             </a:fld>
             <a:endParaRPr lang="ja-JP" altLang="en-US" dirty="0"/>
           </a:p>
@@ -3885,7 +3885,7 @@
             <a:pPr rtl="0"/>
             <a:fld id="{E7D9F5B4-D2B9-4671-9B63-0110E6386A4E}" type="datetime4">
               <a:rPr lang="ja-JP" altLang="en-US" smtClean="0"/>
-              <a:t>2026年6月18日</a:t>
+              <a:t>2026年10月1日</a:t>
             </a:fld>
             <a:endParaRPr lang="en-US" dirty="0"/>
           </a:p>
@@ -4105,7 +4105,7 @@
             <a:pPr rtl="0"/>
             <a:fld id="{0189D195-22A8-4E03-A4C1-FF558F7B427F}" type="datetime4">
               <a:rPr lang="ja-JP" altLang="en-US" smtClean="0"/>
-              <a:t>2026年6月18日</a:t>
+              <a:t>2026年10月1日</a:t>
             </a:fld>
             <a:endParaRPr lang="en-US" dirty="0"/>
           </a:p>
@@ -4335,7 +4335,7 @@
             <a:pPr rtl="0"/>
             <a:fld id="{A59B777F-2BA6-42C0-83EF-2CC97DD0D6E7}" type="datetime4">
               <a:rPr lang="ja-JP" altLang="en-US" smtClean="0"/>
-              <a:t>2026年6月18日</a:t>
+              <a:t>2026年10月1日</a:t>
             </a:fld>
             <a:endParaRPr lang="en-US" dirty="0"/>
           </a:p>
@@ -4556,7 +4556,7 @@
             <a:pPr rtl="0"/>
             <a:fld id="{030C11D6-D226-45B1-8AA5-91C501F3B0E7}" type="datetime4">
               <a:rPr lang="ja-JP" altLang="en-US" smtClean="0"/>
-              <a:t>2026年6月18日</a:t>
+              <a:t>2026年10月1日</a:t>
             </a:fld>
             <a:endParaRPr lang="en-US" dirty="0"/>
           </a:p>
@@ -4808,7 +4808,7 @@
             <a:pPr rtl="0"/>
             <a:fld id="{E5400AA1-06A4-444F-94EA-80BA16484187}" type="datetime4">
               <a:rPr lang="ja-JP" altLang="en-US" smtClean="0"/>
-              <a:t>2026年6月18日</a:t>
+              <a:t>2026年10月1日</a:t>
             </a:fld>
             <a:endParaRPr lang="en-US" dirty="0"/>
           </a:p>
@@ -5160,7 +5160,7 @@
             <a:pPr rtl="0"/>
             <a:fld id="{7538B790-6ACD-441F-B06D-4917F8B429D2}" type="datetime4">
               <a:rPr lang="ja-JP" altLang="en-US" smtClean="0"/>
-              <a:t>2026年6月18日</a:t>
+              <a:t>2026年10月1日</a:t>
             </a:fld>
             <a:endParaRPr lang="en-US" dirty="0"/>
           </a:p>
@@ -5626,7 +5626,7 @@
             <a:pPr rtl="0"/>
             <a:fld id="{BA296CEC-F0EC-4499-B406-555829E93D38}" type="datetime4">
               <a:rPr lang="ja-JP" altLang="en-US" smtClean="0"/>
-              <a:t>2026年6月18日</a:t>
+              <a:t>2026年10月1日</a:t>
             </a:fld>
             <a:endParaRPr lang="en-US" dirty="0"/>
           </a:p>
@@ -5801,7 +5801,7 @@
             <a:pPr rtl="0"/>
             <a:fld id="{7BC8EE4A-0564-4F19-AF56-1B86A81857A1}" type="datetime4">
               <a:rPr lang="ja-JP" altLang="en-US" smtClean="0"/>
-              <a:t>2026年6月18日</a:t>
+              <a:t>2026年10月1日</a:t>
             </a:fld>
             <a:endParaRPr lang="en-US"/>
           </a:p>
@@ -5914,7 +5914,7 @@
             <a:pPr rtl="0"/>
             <a:fld id="{AAD0A0B1-5389-4168-8C71-456999E01C6A}" type="datetime4">
               <a:rPr lang="ja-JP" altLang="en-US" smtClean="0"/>
-              <a:t>2026年6月18日</a:t>
+              <a:t>2026年10月1日</a:t>
             </a:fld>
             <a:endParaRPr lang="en-US" dirty="0"/>
           </a:p>
@@ -6231,7 +6231,7 @@
             <a:pPr rtl="0"/>
             <a:fld id="{3DFAF4E1-8E5B-454D-966C-37225B9702A6}" type="datetime4">
               <a:rPr lang="ja-JP" altLang="en-US" smtClean="0"/>
-              <a:t>2026年6月18日</a:t>
+              <a:t>2026年10月1日</a:t>
             </a:fld>
             <a:endParaRPr lang="en-US" dirty="0"/>
           </a:p>
@@ -6590,7 +6590,7 @@
             <a:pPr rtl="0"/>
             <a:fld id="{3BA228A8-1DDA-4C9E-B7BB-B3D4A4576159}" type="datetime4">
               <a:rPr lang="ja-JP" altLang="en-US" smtClean="0"/>
-              <a:t>2026年6月18日</a:t>
+              <a:t>2026年10月1日</a:t>
             </a:fld>
             <a:endParaRPr lang="en-US"/>
           </a:p>
@@ -7661,7 +7661,7 @@
           <a:p>
             <a:fld id="{196E8732-2B4B-4F0A-8362-53F7A7DF2931}" type="datetime4">
               <a:rPr lang="ja-JP" altLang="en-US" smtClean="0"/>
-              <a:t>2026年6月18日</a:t>
+              <a:t>2026年10月1日</a:t>
             </a:fld>
             <a:endParaRPr lang="en-US" dirty="0"/>
           </a:p>
